--- a/examples/timetable.pptx
+++ b/examples/timetable.pptx
@@ -6038,8 +6038,6 @@
             <a:pPr lvl="0" indent="0" marL="0">
               <a:buNone/>
             </a:pPr>
-            <a:br/>
-            <a:br/>
             <a:r>
               <a:rPr/>
               <a:t>sun123zxy</a:t>

--- a/examples/timetable.pptx
+++ b/examples/timetable.pptx
@@ -6010,7 +6010,7 @@
             </a:pPr>
             <a:r>
               <a:rPr/>
-              <a:t>SunQuarTeX Example - 课表</a:t>
+              <a:t>课表</a:t>
             </a:r>
           </a:p>
         </p:txBody>
@@ -6038,6 +6038,12 @@
             <a:pPr lvl="0" indent="0" marL="0">
               <a:buNone/>
             </a:pPr>
+            <a:r>
+              <a:rPr/>
+              <a:t>SunQuarTeX Examples</a:t>
+            </a:r>
+            <a:br/>
+            <a:br/>
             <a:r>
               <a:rPr/>
               <a:t>sun123zxy</a:t>
